--- a/assets/powerpoints/module-consultation/A3-le-corps-les-sens-et-la-douleur.pptx
+++ b/assets/powerpoints/module-consultation/A3-le-corps-les-sens-et-la-douleur.pptx
@@ -4645,7 +4645,7 @@
             <a:r>
               <a:rPr sz="1300" b="1" i="0" spc="156">
                 <a:solidFill>
-                  <a:srgbClr val="166534"/>
+                  <a:srgbClr val="A5335F"/>
                 </a:solidFill>
                 <a:latin typeface="Verdana"/>
               </a:rPr>
@@ -4985,7 +4985,7 @@
             <a:r>
               <a:rPr sz="1300" b="1" i="0" spc="156">
                 <a:solidFill>
-                  <a:srgbClr val="166534"/>
+                  <a:srgbClr val="A5335F"/>
                 </a:solidFill>
                 <a:latin typeface="Verdana"/>
               </a:rPr>
@@ -5135,7 +5135,7 @@
             </a:avLst>
           </a:prstGeom>
           <a:solidFill>
-            <a:srgbClr val="E3F1E7"/>
+            <a:srgbClr val="FCE9F0"/>
           </a:solidFill>
           <a:ln>
             <a:noFill/>
@@ -5192,7 +5192,7 @@
             <a:r>
               <a:rPr sz="1500" b="1" i="0">
                 <a:solidFill>
-                  <a:srgbClr val="166534"/>
+                  <a:srgbClr val="A5335F"/>
                 </a:solidFill>
                 <a:latin typeface="Verdana"/>
               </a:rPr>
@@ -5312,7 +5312,7 @@
             </a:avLst>
           </a:prstGeom>
           <a:solidFill>
-            <a:srgbClr val="E3F1E7"/>
+            <a:srgbClr val="FCE9F0"/>
           </a:solidFill>
           <a:ln>
             <a:noFill/>
@@ -5369,7 +5369,7 @@
             <a:r>
               <a:rPr sz="1500" b="1" i="0">
                 <a:solidFill>
-                  <a:srgbClr val="166534"/>
+                  <a:srgbClr val="A5335F"/>
                 </a:solidFill>
                 <a:latin typeface="Verdana"/>
               </a:rPr>
@@ -5489,7 +5489,7 @@
             </a:avLst>
           </a:prstGeom>
           <a:solidFill>
-            <a:srgbClr val="E3F1E7"/>
+            <a:srgbClr val="FCE9F0"/>
           </a:solidFill>
           <a:ln>
             <a:noFill/>
@@ -5546,7 +5546,7 @@
             <a:r>
               <a:rPr sz="1500" b="1" i="0">
                 <a:solidFill>
-                  <a:srgbClr val="166534"/>
+                  <a:srgbClr val="A5335F"/>
                 </a:solidFill>
                 <a:latin typeface="Verdana"/>
               </a:rPr>
@@ -5666,7 +5666,7 @@
             </a:avLst>
           </a:prstGeom>
           <a:solidFill>
-            <a:srgbClr val="E3F1E7"/>
+            <a:srgbClr val="FCE9F0"/>
           </a:solidFill>
           <a:ln>
             <a:noFill/>
@@ -5723,7 +5723,7 @@
             <a:r>
               <a:rPr sz="1500" b="1" i="0">
                 <a:solidFill>
-                  <a:srgbClr val="166534"/>
+                  <a:srgbClr val="A5335F"/>
                 </a:solidFill>
                 <a:latin typeface="Verdana"/>
               </a:rPr>
@@ -5843,7 +5843,7 @@
             </a:avLst>
           </a:prstGeom>
           <a:solidFill>
-            <a:srgbClr val="E3F1E7"/>
+            <a:srgbClr val="FCE9F0"/>
           </a:solidFill>
           <a:ln>
             <a:noFill/>
@@ -5900,7 +5900,7 @@
             <a:r>
               <a:rPr sz="1500" b="1" i="0">
                 <a:solidFill>
-                  <a:srgbClr val="166534"/>
+                  <a:srgbClr val="A5335F"/>
                 </a:solidFill>
                 <a:latin typeface="Verdana"/>
               </a:rPr>
@@ -6125,7 +6125,7 @@
             <a:r>
               <a:rPr sz="1300" b="1" i="0" spc="156">
                 <a:solidFill>
-                  <a:srgbClr val="166534"/>
+                  <a:srgbClr val="A5335F"/>
                 </a:solidFill>
                 <a:latin typeface="Verdana"/>
               </a:rPr>
@@ -6275,7 +6275,7 @@
             </a:avLst>
           </a:prstGeom>
           <a:solidFill>
-            <a:srgbClr val="E3F1E7"/>
+            <a:srgbClr val="FCE9F0"/>
           </a:solidFill>
           <a:ln>
             <a:noFill/>
@@ -6332,7 +6332,7 @@
             <a:r>
               <a:rPr sz="1500" b="1" i="0">
                 <a:solidFill>
-                  <a:srgbClr val="166534"/>
+                  <a:srgbClr val="A5335F"/>
                 </a:solidFill>
                 <a:latin typeface="Verdana"/>
               </a:rPr>
@@ -6443,7 +6443,7 @@
             </a:avLst>
           </a:prstGeom>
           <a:solidFill>
-            <a:srgbClr val="E3F1E7"/>
+            <a:srgbClr val="FCE9F0"/>
           </a:solidFill>
           <a:ln>
             <a:noFill/>
@@ -6500,7 +6500,7 @@
             <a:r>
               <a:rPr sz="1500" b="1" i="0">
                 <a:solidFill>
-                  <a:srgbClr val="166534"/>
+                  <a:srgbClr val="A5335F"/>
                 </a:solidFill>
                 <a:latin typeface="Verdana"/>
               </a:rPr>
@@ -6611,7 +6611,7 @@
             </a:avLst>
           </a:prstGeom>
           <a:solidFill>
-            <a:srgbClr val="E3F1E7"/>
+            <a:srgbClr val="FCE9F0"/>
           </a:solidFill>
           <a:ln>
             <a:noFill/>
@@ -6668,7 +6668,7 @@
             <a:r>
               <a:rPr sz="1500" b="1" i="0">
                 <a:solidFill>
-                  <a:srgbClr val="166534"/>
+                  <a:srgbClr val="A5335F"/>
                 </a:solidFill>
                 <a:latin typeface="Verdana"/>
               </a:rPr>
@@ -6779,7 +6779,7 @@
             </a:avLst>
           </a:prstGeom>
           <a:solidFill>
-            <a:srgbClr val="E3F1E7"/>
+            <a:srgbClr val="FCE9F0"/>
           </a:solidFill>
           <a:ln>
             <a:noFill/>
@@ -6836,7 +6836,7 @@
             <a:r>
               <a:rPr sz="1500" b="1" i="0">
                 <a:solidFill>
-                  <a:srgbClr val="166534"/>
+                  <a:srgbClr val="A5335F"/>
                 </a:solidFill>
                 <a:latin typeface="Verdana"/>
               </a:rPr>
@@ -6947,7 +6947,7 @@
             </a:avLst>
           </a:prstGeom>
           <a:solidFill>
-            <a:srgbClr val="E3F1E7"/>
+            <a:srgbClr val="FCE9F0"/>
           </a:solidFill>
           <a:ln>
             <a:noFill/>
@@ -7004,7 +7004,7 @@
             <a:r>
               <a:rPr sz="1500" b="1" i="0">
                 <a:solidFill>
-                  <a:srgbClr val="166534"/>
+                  <a:srgbClr val="A5335F"/>
                 </a:solidFill>
                 <a:latin typeface="Verdana"/>
               </a:rPr>
@@ -7220,7 +7220,7 @@
             <a:r>
               <a:rPr sz="1300" b="1" i="0" spc="156">
                 <a:solidFill>
-                  <a:srgbClr val="166534"/>
+                  <a:srgbClr val="A5335F"/>
                 </a:solidFill>
                 <a:latin typeface="Verdana"/>
               </a:rPr>
@@ -7370,7 +7370,7 @@
             </a:avLst>
           </a:prstGeom>
           <a:solidFill>
-            <a:srgbClr val="E3F1E7"/>
+            <a:srgbClr val="FCE9F0"/>
           </a:solidFill>
           <a:ln>
             <a:noFill/>
@@ -7427,7 +7427,7 @@
             <a:r>
               <a:rPr sz="1500" b="1" i="0">
                 <a:solidFill>
-                  <a:srgbClr val="166534"/>
+                  <a:srgbClr val="A5335F"/>
                 </a:solidFill>
                 <a:latin typeface="Verdana"/>
               </a:rPr>
@@ -7547,7 +7547,7 @@
             </a:avLst>
           </a:prstGeom>
           <a:solidFill>
-            <a:srgbClr val="E3F1E7"/>
+            <a:srgbClr val="FCE9F0"/>
           </a:solidFill>
           <a:ln>
             <a:noFill/>
@@ -7604,7 +7604,7 @@
             <a:r>
               <a:rPr sz="1500" b="1" i="0">
                 <a:solidFill>
-                  <a:srgbClr val="166534"/>
+                  <a:srgbClr val="A5335F"/>
                 </a:solidFill>
                 <a:latin typeface="Verdana"/>
               </a:rPr>
@@ -7724,7 +7724,7 @@
             </a:avLst>
           </a:prstGeom>
           <a:solidFill>
-            <a:srgbClr val="E3F1E7"/>
+            <a:srgbClr val="FCE9F0"/>
           </a:solidFill>
           <a:ln>
             <a:noFill/>
@@ -7781,7 +7781,7 @@
             <a:r>
               <a:rPr sz="1500" b="1" i="0">
                 <a:solidFill>
-                  <a:srgbClr val="166534"/>
+                  <a:srgbClr val="A5335F"/>
                 </a:solidFill>
                 <a:latin typeface="Verdana"/>
               </a:rPr>
@@ -7901,7 +7901,7 @@
             </a:avLst>
           </a:prstGeom>
           <a:solidFill>
-            <a:srgbClr val="E3F1E7"/>
+            <a:srgbClr val="FCE9F0"/>
           </a:solidFill>
           <a:ln>
             <a:noFill/>
@@ -7958,7 +7958,7 @@
             <a:r>
               <a:rPr sz="1500" b="1" i="0">
                 <a:solidFill>
-                  <a:srgbClr val="166534"/>
+                  <a:srgbClr val="A5335F"/>
                 </a:solidFill>
                 <a:latin typeface="Verdana"/>
               </a:rPr>
@@ -8078,7 +8078,7 @@
             </a:avLst>
           </a:prstGeom>
           <a:solidFill>
-            <a:srgbClr val="E3F1E7"/>
+            <a:srgbClr val="FCE9F0"/>
           </a:solidFill>
           <a:ln>
             <a:noFill/>
@@ -8135,7 +8135,7 @@
             <a:r>
               <a:rPr sz="1500" b="1" i="0">
                 <a:solidFill>
-                  <a:srgbClr val="166534"/>
+                  <a:srgbClr val="A5335F"/>
                 </a:solidFill>
                 <a:latin typeface="Verdana"/>
               </a:rPr>
@@ -8360,7 +8360,7 @@
             <a:r>
               <a:rPr sz="1300" b="1" i="0" spc="156">
                 <a:solidFill>
-                  <a:srgbClr val="166534"/>
+                  <a:srgbClr val="A5335F"/>
                 </a:solidFill>
                 <a:latin typeface="Verdana"/>
               </a:rPr>
@@ -8510,7 +8510,7 @@
             </a:avLst>
           </a:prstGeom>
           <a:solidFill>
-            <a:srgbClr val="E3F1E7"/>
+            <a:srgbClr val="FCE9F0"/>
           </a:solidFill>
           <a:ln>
             <a:noFill/>
@@ -8567,7 +8567,7 @@
             <a:r>
               <a:rPr sz="1500" b="1" i="0">
                 <a:solidFill>
-                  <a:srgbClr val="166534"/>
+                  <a:srgbClr val="A5335F"/>
                 </a:solidFill>
                 <a:latin typeface="Verdana"/>
               </a:rPr>
@@ -8678,7 +8678,7 @@
             </a:avLst>
           </a:prstGeom>
           <a:solidFill>
-            <a:srgbClr val="E3F1E7"/>
+            <a:srgbClr val="FCE9F0"/>
           </a:solidFill>
           <a:ln>
             <a:noFill/>
@@ -8735,7 +8735,7 @@
             <a:r>
               <a:rPr sz="1500" b="1" i="0">
                 <a:solidFill>
-                  <a:srgbClr val="166534"/>
+                  <a:srgbClr val="A5335F"/>
                 </a:solidFill>
                 <a:latin typeface="Verdana"/>
               </a:rPr>
@@ -8846,7 +8846,7 @@
             </a:avLst>
           </a:prstGeom>
           <a:solidFill>
-            <a:srgbClr val="E3F1E7"/>
+            <a:srgbClr val="FCE9F0"/>
           </a:solidFill>
           <a:ln>
             <a:noFill/>
@@ -8903,7 +8903,7 @@
             <a:r>
               <a:rPr sz="1500" b="1" i="0">
                 <a:solidFill>
-                  <a:srgbClr val="166534"/>
+                  <a:srgbClr val="A5335F"/>
                 </a:solidFill>
                 <a:latin typeface="Verdana"/>
               </a:rPr>
@@ -9014,7 +9014,7 @@
             </a:avLst>
           </a:prstGeom>
           <a:solidFill>
-            <a:srgbClr val="E3F1E7"/>
+            <a:srgbClr val="FCE9F0"/>
           </a:solidFill>
           <a:ln>
             <a:noFill/>
@@ -9071,7 +9071,7 @@
             <a:r>
               <a:rPr sz="1500" b="1" i="0">
                 <a:solidFill>
-                  <a:srgbClr val="166534"/>
+                  <a:srgbClr val="A5335F"/>
                 </a:solidFill>
                 <a:latin typeface="Verdana"/>
               </a:rPr>
@@ -9287,7 +9287,7 @@
             <a:r>
               <a:rPr sz="1300" b="1" i="0" spc="156">
                 <a:solidFill>
-                  <a:srgbClr val="166534"/>
+                  <a:srgbClr val="A5335F"/>
                 </a:solidFill>
                 <a:latin typeface="Verdana"/>
               </a:rPr>
@@ -9437,7 +9437,7 @@
             </a:avLst>
           </a:prstGeom>
           <a:solidFill>
-            <a:srgbClr val="E3F1E7"/>
+            <a:srgbClr val="FCE9F0"/>
           </a:solidFill>
           <a:ln>
             <a:noFill/>
@@ -9494,7 +9494,7 @@
             <a:r>
               <a:rPr sz="1500" b="1" i="0">
                 <a:solidFill>
-                  <a:srgbClr val="166534"/>
+                  <a:srgbClr val="A5335F"/>
                 </a:solidFill>
                 <a:latin typeface="Verdana"/>
               </a:rPr>
@@ -9614,7 +9614,7 @@
             </a:avLst>
           </a:prstGeom>
           <a:solidFill>
-            <a:srgbClr val="E3F1E7"/>
+            <a:srgbClr val="FCE9F0"/>
           </a:solidFill>
           <a:ln>
             <a:noFill/>
@@ -9671,7 +9671,7 @@
             <a:r>
               <a:rPr sz="1500" b="1" i="0">
                 <a:solidFill>
-                  <a:srgbClr val="166534"/>
+                  <a:srgbClr val="A5335F"/>
                 </a:solidFill>
                 <a:latin typeface="Verdana"/>
               </a:rPr>
@@ -9791,7 +9791,7 @@
             </a:avLst>
           </a:prstGeom>
           <a:solidFill>
-            <a:srgbClr val="E3F1E7"/>
+            <a:srgbClr val="FCE9F0"/>
           </a:solidFill>
           <a:ln>
             <a:noFill/>
@@ -9848,7 +9848,7 @@
             <a:r>
               <a:rPr sz="1500" b="1" i="0">
                 <a:solidFill>
-                  <a:srgbClr val="166534"/>
+                  <a:srgbClr val="A5335F"/>
                 </a:solidFill>
                 <a:latin typeface="Verdana"/>
               </a:rPr>
@@ -9968,7 +9968,7 @@
             </a:avLst>
           </a:prstGeom>
           <a:solidFill>
-            <a:srgbClr val="E3F1E7"/>
+            <a:srgbClr val="FCE9F0"/>
           </a:solidFill>
           <a:ln>
             <a:noFill/>
@@ -10025,7 +10025,7 @@
             <a:r>
               <a:rPr sz="1500" b="1" i="0">
                 <a:solidFill>
-                  <a:srgbClr val="166534"/>
+                  <a:srgbClr val="A5335F"/>
                 </a:solidFill>
                 <a:latin typeface="Verdana"/>
               </a:rPr>
@@ -10250,7 +10250,7 @@
             <a:r>
               <a:rPr sz="1300" b="1" i="0" spc="156">
                 <a:solidFill>
-                  <a:srgbClr val="166534"/>
+                  <a:srgbClr val="A5335F"/>
                 </a:solidFill>
                 <a:latin typeface="Verdana"/>
               </a:rPr>
@@ -11262,7 +11262,7 @@
             <a:r>
               <a:rPr sz="1300" b="1" i="0" spc="156">
                 <a:solidFill>
-                  <a:srgbClr val="166534"/>
+                  <a:srgbClr val="A5335F"/>
                 </a:solidFill>
                 <a:latin typeface="Verdana"/>
               </a:rPr>
@@ -11373,7 +11373,7 @@
             </a:avLst>
           </a:prstGeom>
           <a:solidFill>
-            <a:srgbClr val="E3F1E7"/>
+            <a:srgbClr val="FCE9F0"/>
           </a:solidFill>
           <a:ln>
             <a:noFill/>
@@ -11430,7 +11430,7 @@
             <a:r>
               <a:rPr sz="1500" b="1" i="0">
                 <a:solidFill>
-                  <a:srgbClr val="166534"/>
+                  <a:srgbClr val="A5335F"/>
                 </a:solidFill>
                 <a:latin typeface="Verdana"/>
               </a:rPr>
@@ -11541,7 +11541,7 @@
             </a:avLst>
           </a:prstGeom>
           <a:solidFill>
-            <a:srgbClr val="E3F1E7"/>
+            <a:srgbClr val="FCE9F0"/>
           </a:solidFill>
           <a:ln>
             <a:noFill/>
@@ -11598,7 +11598,7 @@
             <a:r>
               <a:rPr sz="1500" b="1" i="0">
                 <a:solidFill>
-                  <a:srgbClr val="166534"/>
+                  <a:srgbClr val="A5335F"/>
                 </a:solidFill>
                 <a:latin typeface="Verdana"/>
               </a:rPr>
@@ -11709,7 +11709,7 @@
             </a:avLst>
           </a:prstGeom>
           <a:solidFill>
-            <a:srgbClr val="E3F1E7"/>
+            <a:srgbClr val="FCE9F0"/>
           </a:solidFill>
           <a:ln>
             <a:noFill/>
@@ -11766,7 +11766,7 @@
             <a:r>
               <a:rPr sz="1500" b="1" i="0">
                 <a:solidFill>
-                  <a:srgbClr val="166534"/>
+                  <a:srgbClr val="A5335F"/>
                 </a:solidFill>
                 <a:latin typeface="Verdana"/>
               </a:rPr>
@@ -11877,7 +11877,7 @@
             </a:avLst>
           </a:prstGeom>
           <a:solidFill>
-            <a:srgbClr val="E3F1E7"/>
+            <a:srgbClr val="FCE9F0"/>
           </a:solidFill>
           <a:ln>
             <a:noFill/>
@@ -11934,7 +11934,7 @@
             <a:r>
               <a:rPr sz="1500" b="1" i="0">
                 <a:solidFill>
-                  <a:srgbClr val="166534"/>
+                  <a:srgbClr val="A5335F"/>
                 </a:solidFill>
                 <a:latin typeface="Verdana"/>
               </a:rPr>
@@ -12150,7 +12150,7 @@
             <a:r>
               <a:rPr sz="1300" b="1" i="0" spc="156">
                 <a:solidFill>
-                  <a:srgbClr val="166534"/>
+                  <a:srgbClr val="A5335F"/>
                 </a:solidFill>
                 <a:latin typeface="Verdana"/>
               </a:rPr>
@@ -13090,7 +13090,7 @@
             <a:r>
               <a:rPr sz="1300" b="1" i="0" spc="156">
                 <a:solidFill>
-                  <a:srgbClr val="166534"/>
+                  <a:srgbClr val="A5335F"/>
                 </a:solidFill>
                 <a:latin typeface="Verdana"/>
               </a:rPr>
@@ -13910,7 +13910,7 @@
             <a:r>
               <a:rPr sz="1300" b="1" i="0" spc="156">
                 <a:solidFill>
-                  <a:srgbClr val="166534"/>
+                  <a:srgbClr val="A5335F"/>
                 </a:solidFill>
                 <a:latin typeface="Verdana"/>
               </a:rPr>
@@ -14112,7 +14112,7 @@
             <a:r>
               <a:rPr sz="1400" b="1" i="0">
                 <a:solidFill>
-                  <a:srgbClr val="166534"/>
+                  <a:srgbClr val="A5335F"/>
                 </a:solidFill>
                 <a:latin typeface="Verdana"/>
               </a:rPr>
@@ -14232,7 +14232,7 @@
             <a:r>
               <a:rPr sz="1400" b="1" i="0">
                 <a:solidFill>
-                  <a:srgbClr val="166534"/>
+                  <a:srgbClr val="A5335F"/>
                 </a:solidFill>
                 <a:latin typeface="Verdana"/>
               </a:rPr>
@@ -14352,7 +14352,7 @@
             <a:r>
               <a:rPr sz="1400" b="1" i="0">
                 <a:solidFill>
-                  <a:srgbClr val="166534"/>
+                  <a:srgbClr val="A5335F"/>
                 </a:solidFill>
                 <a:latin typeface="Verdana"/>
               </a:rPr>
@@ -14472,7 +14472,7 @@
             <a:r>
               <a:rPr sz="1400" b="1" i="0">
                 <a:solidFill>
-                  <a:srgbClr val="166534"/>
+                  <a:srgbClr val="A5335F"/>
                 </a:solidFill>
                 <a:latin typeface="Verdana"/>
               </a:rPr>
@@ -14592,7 +14592,7 @@
             <a:r>
               <a:rPr sz="1400" b="1" i="0">
                 <a:solidFill>
-                  <a:srgbClr val="166534"/>
+                  <a:srgbClr val="A5335F"/>
                 </a:solidFill>
                 <a:latin typeface="Verdana"/>
               </a:rPr>
@@ -14893,7 +14893,7 @@
             <a:r>
               <a:rPr sz="1300" b="1" i="0" spc="156">
                 <a:solidFill>
-                  <a:srgbClr val="166534"/>
+                  <a:srgbClr val="A5335F"/>
                 </a:solidFill>
                 <a:latin typeface="Verdana"/>
               </a:rPr>
@@ -14919,7 +14919,7 @@
             </a:avLst>
           </a:prstGeom>
           <a:solidFill>
-            <a:srgbClr val="E3F1E7"/>
+            <a:srgbClr val="FCE9F0"/>
           </a:solidFill>
           <a:ln w="12700">
             <a:solidFill>
@@ -15240,7 +15240,7 @@
             <a:r>
               <a:rPr sz="1300" b="1" i="0" spc="156">
                 <a:solidFill>
-                  <a:srgbClr val="166534"/>
+                  <a:srgbClr val="A5335F"/>
                 </a:solidFill>
                 <a:latin typeface="Verdana"/>
               </a:rPr>
@@ -15364,7 +15364,7 @@
             <a:r>
               <a:rPr sz="2400" b="1" i="0">
                 <a:solidFill>
-                  <a:srgbClr val="166534"/>
+                  <a:srgbClr val="A5335F"/>
                 </a:solidFill>
                 <a:latin typeface="Verdana"/>
               </a:rPr>
@@ -15488,7 +15488,7 @@
             <a:r>
               <a:rPr sz="2400" b="1" i="0">
                 <a:solidFill>
-                  <a:srgbClr val="166534"/>
+                  <a:srgbClr val="A5335F"/>
                 </a:solidFill>
                 <a:latin typeface="Verdana"/>
               </a:rPr>
@@ -15612,7 +15612,7 @@
             <a:r>
               <a:rPr sz="2400" b="1" i="0">
                 <a:solidFill>
-                  <a:srgbClr val="166534"/>
+                  <a:srgbClr val="A5335F"/>
                 </a:solidFill>
                 <a:latin typeface="Verdana"/>
               </a:rPr>
@@ -15736,7 +15736,7 @@
             <a:r>
               <a:rPr sz="2400" b="1" i="0">
                 <a:solidFill>
-                  <a:srgbClr val="166534"/>
+                  <a:srgbClr val="A5335F"/>
                 </a:solidFill>
                 <a:latin typeface="Verdana"/>
               </a:rPr>
@@ -15952,7 +15952,7 @@
             <a:r>
               <a:rPr sz="1300" b="1" i="0" spc="156">
                 <a:solidFill>
-                  <a:srgbClr val="166534"/>
+                  <a:srgbClr val="A5335F"/>
                 </a:solidFill>
                 <a:latin typeface="Verdana"/>
               </a:rPr>
@@ -16232,7 +16232,7 @@
             <a:r>
               <a:rPr sz="1800" b="1" i="0">
                 <a:solidFill>
-                  <a:srgbClr val="166534"/>
+                  <a:srgbClr val="A5335F"/>
                 </a:solidFill>
                 <a:latin typeface="Verdana"/>
               </a:rPr>
@@ -16391,7 +16391,7 @@
             <a:r>
               <a:rPr sz="1800" b="1" i="0">
                 <a:solidFill>
-                  <a:srgbClr val="166534"/>
+                  <a:srgbClr val="A5335F"/>
                 </a:solidFill>
                 <a:latin typeface="Verdana"/>
               </a:rPr>
@@ -16550,7 +16550,7 @@
             <a:r>
               <a:rPr sz="1800" b="1" i="0">
                 <a:solidFill>
-                  <a:srgbClr val="166534"/>
+                  <a:srgbClr val="A5335F"/>
                 </a:solidFill>
                 <a:latin typeface="Verdana"/>
               </a:rPr>
@@ -16851,7 +16851,7 @@
             <a:r>
               <a:rPr sz="1300" b="1" i="0" spc="156">
                 <a:solidFill>
-                  <a:srgbClr val="166534"/>
+                  <a:srgbClr val="A5335F"/>
                 </a:solidFill>
                 <a:latin typeface="Verdana"/>
               </a:rPr>
@@ -17001,7 +17001,7 @@
             </a:avLst>
           </a:prstGeom>
           <a:solidFill>
-            <a:srgbClr val="E3F1E7"/>
+            <a:srgbClr val="FCE9F0"/>
           </a:solidFill>
           <a:ln>
             <a:noFill/>
@@ -17058,7 +17058,7 @@
             <a:r>
               <a:rPr sz="1500" b="1" i="0">
                 <a:solidFill>
-                  <a:srgbClr val="166534"/>
+                  <a:srgbClr val="A5335F"/>
                 </a:solidFill>
                 <a:latin typeface="Verdana"/>
               </a:rPr>
@@ -17169,7 +17169,7 @@
             </a:avLst>
           </a:prstGeom>
           <a:solidFill>
-            <a:srgbClr val="E3F1E7"/>
+            <a:srgbClr val="FCE9F0"/>
           </a:solidFill>
           <a:ln>
             <a:noFill/>
@@ -17226,7 +17226,7 @@
             <a:r>
               <a:rPr sz="1500" b="1" i="0">
                 <a:solidFill>
-                  <a:srgbClr val="166534"/>
+                  <a:srgbClr val="A5335F"/>
                 </a:solidFill>
                 <a:latin typeface="Verdana"/>
               </a:rPr>
@@ -17337,7 +17337,7 @@
             </a:avLst>
           </a:prstGeom>
           <a:solidFill>
-            <a:srgbClr val="E3F1E7"/>
+            <a:srgbClr val="FCE9F0"/>
           </a:solidFill>
           <a:ln>
             <a:noFill/>
@@ -17394,7 +17394,7 @@
             <a:r>
               <a:rPr sz="1500" b="1" i="0">
                 <a:solidFill>
-                  <a:srgbClr val="166534"/>
+                  <a:srgbClr val="A5335F"/>
                 </a:solidFill>
                 <a:latin typeface="Verdana"/>
               </a:rPr>
@@ -17505,7 +17505,7 @@
             </a:avLst>
           </a:prstGeom>
           <a:solidFill>
-            <a:srgbClr val="E3F1E7"/>
+            <a:srgbClr val="FCE9F0"/>
           </a:solidFill>
           <a:ln>
             <a:noFill/>
@@ -17562,7 +17562,7 @@
             <a:r>
               <a:rPr sz="1500" b="1" i="0">
                 <a:solidFill>
-                  <a:srgbClr val="166534"/>
+                  <a:srgbClr val="A5335F"/>
                 </a:solidFill>
                 <a:latin typeface="Verdana"/>
               </a:rPr>
@@ -17673,7 +17673,7 @@
             </a:avLst>
           </a:prstGeom>
           <a:solidFill>
-            <a:srgbClr val="E3F1E7"/>
+            <a:srgbClr val="FCE9F0"/>
           </a:solidFill>
           <a:ln>
             <a:noFill/>
@@ -17730,7 +17730,7 @@
             <a:r>
               <a:rPr sz="1500" b="1" i="0">
                 <a:solidFill>
-                  <a:srgbClr val="166534"/>
+                  <a:srgbClr val="A5335F"/>
                 </a:solidFill>
                 <a:latin typeface="Verdana"/>
               </a:rPr>
